--- a/Registro/Pres/registro.pptx
+++ b/Registro/Pres/registro.pptx
@@ -296,7 +296,7 @@
             <a:fld id="{CFACC4EE-0BEF-1646-BAF7-943324C0CB09}" type="datetimeFigureOut">
               <a:rPr lang="es-MX" smtClean="0"/>
               <a:pPr/>
-              <a:t>01/12/21</a:t>
+              <a:t>03/12/21</a:t>
             </a:fld>
             <a:endParaRPr lang="es-MX"/>
           </a:p>
@@ -854,7 +854,7 @@
           <a:p>
             <a:fld id="{CFACC4EE-0BEF-1646-BAF7-943324C0CB09}" type="datetimeFigureOut">
               <a:rPr lang="es-MX" smtClean="0"/>
-              <a:t>01/12/21</a:t>
+              <a:t>03/12/21</a:t>
             </a:fld>
             <a:endParaRPr lang="es-MX"/>
           </a:p>
@@ -1064,7 +1064,7 @@
           <a:p>
             <a:fld id="{CFACC4EE-0BEF-1646-BAF7-943324C0CB09}" type="datetimeFigureOut">
               <a:rPr lang="es-MX" smtClean="0"/>
-              <a:t>01/12/21</a:t>
+              <a:t>03/12/21</a:t>
             </a:fld>
             <a:endParaRPr lang="es-MX"/>
           </a:p>
@@ -1315,7 +1315,7 @@
             <a:fld id="{CFACC4EE-0BEF-1646-BAF7-943324C0CB09}" type="datetimeFigureOut">
               <a:rPr lang="es-MX" smtClean="0"/>
               <a:pPr/>
-              <a:t>01/12/21</a:t>
+              <a:t>03/12/21</a:t>
             </a:fld>
             <a:endParaRPr lang="es-MX"/>
           </a:p>
@@ -1744,7 +1744,7 @@
             <a:fld id="{CFACC4EE-0BEF-1646-BAF7-943324C0CB09}" type="datetimeFigureOut">
               <a:rPr lang="es-MX" smtClean="0"/>
               <a:pPr/>
-              <a:t>01/12/21</a:t>
+              <a:t>03/12/21</a:t>
             </a:fld>
             <a:endParaRPr lang="es-MX"/>
           </a:p>
@@ -2159,6 +2159,102 @@
           </a:xfrm>
         </p:spPr>
         <p:txBody>
+          <a:bodyPr>
+            <a:normAutofit/>
+          </a:bodyPr>
+          <a:lstStyle>
+            <a:lvl1pPr algn="just">
+              <a:defRPr sz="1400">
+                <a:latin typeface="Poppins" pitchFamily="2" charset="77"/>
+                <a:cs typeface="Poppins" pitchFamily="2" charset="77"/>
+              </a:defRPr>
+            </a:lvl1pPr>
+            <a:lvl2pPr algn="just">
+              <a:defRPr sz="1400">
+                <a:latin typeface="Poppins" pitchFamily="2" charset="77"/>
+                <a:cs typeface="Poppins" pitchFamily="2" charset="77"/>
+              </a:defRPr>
+            </a:lvl2pPr>
+            <a:lvl3pPr algn="just">
+              <a:defRPr sz="1400">
+                <a:latin typeface="Poppins" pitchFamily="2" charset="77"/>
+                <a:cs typeface="Poppins" pitchFamily="2" charset="77"/>
+              </a:defRPr>
+            </a:lvl3pPr>
+            <a:lvl4pPr algn="just">
+              <a:defRPr sz="1400">
+                <a:latin typeface="Poppins" pitchFamily="2" charset="77"/>
+                <a:cs typeface="Poppins" pitchFamily="2" charset="77"/>
+              </a:defRPr>
+            </a:lvl4pPr>
+            <a:lvl5pPr algn="just">
+              <a:defRPr sz="1400">
+                <a:latin typeface="Poppins" pitchFamily="2" charset="77"/>
+                <a:cs typeface="Poppins" pitchFamily="2" charset="77"/>
+              </a:defRPr>
+            </a:lvl5pPr>
+          </a:lstStyle>
+          <a:p>
+            <a:pPr lvl="0"/>
+            <a:r>
+              <a:rPr lang="es-MX"/>
+              <a:t>Haga clic para modificar los estilos de texto del patrón</a:t>
+            </a:r>
+          </a:p>
+          <a:p>
+            <a:pPr lvl="1"/>
+            <a:r>
+              <a:rPr lang="es-MX"/>
+              <a:t>Segundo nivel</a:t>
+            </a:r>
+          </a:p>
+          <a:p>
+            <a:pPr lvl="2"/>
+            <a:r>
+              <a:rPr lang="es-MX"/>
+              <a:t>Tercer nivel</a:t>
+            </a:r>
+          </a:p>
+          <a:p>
+            <a:pPr lvl="3"/>
+            <a:r>
+              <a:rPr lang="es-MX"/>
+              <a:t>Cuarto nivel</a:t>
+            </a:r>
+          </a:p>
+          <a:p>
+            <a:pPr lvl="4"/>
+            <a:r>
+              <a:rPr lang="es-MX"/>
+              <a:t>Quinto nivel</a:t>
+            </a:r>
+            <a:endParaRPr/>
+          </a:p>
+        </p:txBody>
+      </p:sp>
+      <p:sp>
+        <p:nvSpPr>
+          <p:cNvPr id="4" name="Marcador de contenido 3">
+            <a:extLst>
+              <a:ext uri="{FF2B5EF4-FFF2-40B4-BE49-F238E27FC236}">
+                <a16:creationId xmlns:a16="http://schemas.microsoft.com/office/drawing/2014/main" id="{31AAFE82-0E75-CA44-9DCA-9F2D683440E6}"/>
+              </a:ext>
+            </a:extLst>
+          </p:cNvPr>
+          <p:cNvSpPr>
+            <a:spLocks noGrp="1"/>
+          </p:cNvSpPr>
+          <p:nvPr>
+            <p:ph sz="half" idx="2"/>
+          </p:nvPr>
+        </p:nvSpPr>
+        <p:spPr>
+          <a:xfrm>
+            <a:off x="6172200" y="1825625"/>
+            <a:ext cx="5181600" cy="4067427"/>
+          </a:xfrm>
+        </p:spPr>
+        <p:txBody>
           <a:bodyPr/>
           <a:lstStyle>
             <a:lvl1pPr>
@@ -2232,26 +2328,21 @@
       </p:sp>
       <p:sp>
         <p:nvSpPr>
-          <p:cNvPr id="4" name="Marcador de contenido 3">
-            <a:extLst>
-              <a:ext uri="{FF2B5EF4-FFF2-40B4-BE49-F238E27FC236}">
-                <a16:creationId xmlns:a16="http://schemas.microsoft.com/office/drawing/2014/main" id="{31AAFE82-0E75-CA44-9DCA-9F2D683440E6}"/>
-              </a:ext>
-            </a:extLst>
-          </p:cNvPr>
-          <p:cNvSpPr>
-            <a:spLocks noGrp="1"/>
-          </p:cNvSpPr>
-          <p:nvPr>
-            <p:ph sz="half" idx="2"/>
-          </p:nvPr>
-        </p:nvSpPr>
-        <p:spPr>
-          <a:xfrm>
-            <a:off x="6172200" y="1825625"/>
-            <a:ext cx="5181600" cy="4067427"/>
-          </a:xfrm>
-        </p:spPr>
+          <p:cNvPr id="5" name="Marcador de fecha 4">
+            <a:extLst>
+              <a:ext uri="{FF2B5EF4-FFF2-40B4-BE49-F238E27FC236}">
+                <a16:creationId xmlns:a16="http://schemas.microsoft.com/office/drawing/2014/main" id="{6045E9CD-10B1-D442-A541-E733CFC085ED}"/>
+              </a:ext>
+            </a:extLst>
+          </p:cNvPr>
+          <p:cNvSpPr>
+            <a:spLocks noGrp="1"/>
+          </p:cNvSpPr>
+          <p:nvPr>
+            <p:ph type="dt" sz="half" idx="10"/>
+          </p:nvPr>
+        </p:nvSpPr>
+        <p:spPr/>
         <p:txBody>
           <a:bodyPr/>
           <a:lstStyle>
@@ -2261,101 +2352,12 @@
                 <a:cs typeface="Poppins" pitchFamily="2" charset="77"/>
               </a:defRPr>
             </a:lvl1pPr>
-            <a:lvl2pPr>
-              <a:defRPr>
-                <a:latin typeface="Poppins" pitchFamily="2" charset="77"/>
-                <a:cs typeface="Poppins" pitchFamily="2" charset="77"/>
-              </a:defRPr>
-            </a:lvl2pPr>
-            <a:lvl3pPr>
-              <a:defRPr>
-                <a:latin typeface="Poppins" pitchFamily="2" charset="77"/>
-                <a:cs typeface="Poppins" pitchFamily="2" charset="77"/>
-              </a:defRPr>
-            </a:lvl3pPr>
-            <a:lvl4pPr>
-              <a:defRPr>
-                <a:latin typeface="Poppins" pitchFamily="2" charset="77"/>
-                <a:cs typeface="Poppins" pitchFamily="2" charset="77"/>
-              </a:defRPr>
-            </a:lvl4pPr>
-            <a:lvl5pPr>
-              <a:defRPr>
-                <a:latin typeface="Poppins" pitchFamily="2" charset="77"/>
-                <a:cs typeface="Poppins" pitchFamily="2" charset="77"/>
-              </a:defRPr>
-            </a:lvl5pPr>
-          </a:lstStyle>
-          <a:p>
-            <a:pPr lvl="0"/>
-            <a:r>
-              <a:rPr lang="es-MX"/>
-              <a:t>Haga clic para modificar los estilos de texto del patrón</a:t>
-            </a:r>
-          </a:p>
-          <a:p>
-            <a:pPr lvl="1"/>
-            <a:r>
-              <a:rPr lang="es-MX"/>
-              <a:t>Segundo nivel</a:t>
-            </a:r>
-          </a:p>
-          <a:p>
-            <a:pPr lvl="2"/>
-            <a:r>
-              <a:rPr lang="es-MX"/>
-              <a:t>Tercer nivel</a:t>
-            </a:r>
-          </a:p>
-          <a:p>
-            <a:pPr lvl="3"/>
-            <a:r>
-              <a:rPr lang="es-MX"/>
-              <a:t>Cuarto nivel</a:t>
-            </a:r>
-          </a:p>
-          <a:p>
-            <a:pPr lvl="4"/>
-            <a:r>
-              <a:rPr lang="es-MX"/>
-              <a:t>Quinto nivel</a:t>
-            </a:r>
-            <a:endParaRPr/>
-          </a:p>
-        </p:txBody>
-      </p:sp>
-      <p:sp>
-        <p:nvSpPr>
-          <p:cNvPr id="5" name="Marcador de fecha 4">
-            <a:extLst>
-              <a:ext uri="{FF2B5EF4-FFF2-40B4-BE49-F238E27FC236}">
-                <a16:creationId xmlns:a16="http://schemas.microsoft.com/office/drawing/2014/main" id="{6045E9CD-10B1-D442-A541-E733CFC085ED}"/>
-              </a:ext>
-            </a:extLst>
-          </p:cNvPr>
-          <p:cNvSpPr>
-            <a:spLocks noGrp="1"/>
-          </p:cNvSpPr>
-          <p:nvPr>
-            <p:ph type="dt" sz="half" idx="10"/>
-          </p:nvPr>
-        </p:nvSpPr>
-        <p:spPr/>
-        <p:txBody>
-          <a:bodyPr/>
-          <a:lstStyle>
-            <a:lvl1pPr>
-              <a:defRPr>
-                <a:latin typeface="Poppins" pitchFamily="2" charset="77"/>
-                <a:cs typeface="Poppins" pitchFamily="2" charset="77"/>
-              </a:defRPr>
-            </a:lvl1pPr>
           </a:lstStyle>
           <a:p>
             <a:fld id="{CFACC4EE-0BEF-1646-BAF7-943324C0CB09}" type="datetimeFigureOut">
               <a:rPr lang="es-MX" smtClean="0"/>
               <a:pPr/>
-              <a:t>01/12/21</a:t>
+              <a:t>03/12/21</a:t>
             </a:fld>
             <a:endParaRPr lang="es-MX"/>
           </a:p>
@@ -2988,7 +2990,7 @@
             <a:fld id="{CFACC4EE-0BEF-1646-BAF7-943324C0CB09}" type="datetimeFigureOut">
               <a:rPr lang="es-MX" smtClean="0"/>
               <a:pPr/>
-              <a:t>01/12/21</a:t>
+              <a:t>03/12/21</a:t>
             </a:fld>
             <a:endParaRPr lang="es-MX"/>
           </a:p>
@@ -3280,7 +3282,7 @@
             <a:fld id="{CFACC4EE-0BEF-1646-BAF7-943324C0CB09}" type="datetimeFigureOut">
               <a:rPr lang="es-MX" smtClean="0"/>
               <a:pPr/>
-              <a:t>01/12/21</a:t>
+              <a:t>03/12/21</a:t>
             </a:fld>
             <a:endParaRPr lang="es-MX"/>
           </a:p>
@@ -3528,7 +3530,7 @@
           <a:p>
             <a:fld id="{CFACC4EE-0BEF-1646-BAF7-943324C0CB09}" type="datetimeFigureOut">
               <a:rPr lang="es-MX" smtClean="0"/>
-              <a:t>01/12/21</a:t>
+              <a:t>03/12/21</a:t>
             </a:fld>
             <a:endParaRPr lang="es-MX"/>
           </a:p>
@@ -3961,7 +3963,7 @@
           <a:p>
             <a:fld id="{CFACC4EE-0BEF-1646-BAF7-943324C0CB09}" type="datetimeFigureOut">
               <a:rPr lang="es-MX" smtClean="0"/>
-              <a:t>01/12/21</a:t>
+              <a:t>03/12/21</a:t>
             </a:fld>
             <a:endParaRPr lang="es-MX"/>
           </a:p>
@@ -4370,7 +4372,7 @@
           <a:p>
             <a:fld id="{CFACC4EE-0BEF-1646-BAF7-943324C0CB09}" type="datetimeFigureOut">
               <a:rPr lang="es-MX" smtClean="0"/>
-              <a:t>01/12/21</a:t>
+              <a:t>03/12/21</a:t>
             </a:fld>
             <a:endParaRPr lang="es-MX"/>
           </a:p>
@@ -4736,7 +4738,7 @@
             <a:fld id="{CFACC4EE-0BEF-1646-BAF7-943324C0CB09}" type="datetimeFigureOut">
               <a:rPr lang="es-MX" smtClean="0"/>
               <a:pPr/>
-              <a:t>01/12/21</a:t>
+              <a:t>03/12/21</a:t>
             </a:fld>
             <a:endParaRPr lang="es-MX"/>
           </a:p>
@@ -5351,7 +5353,7 @@
             </a:pPr>
             <a:r>
               <a:rPr/>
-              <a:t>Al evento “ABP Virtual” llevado a cabo elJueves 02 de diciembre 2021, asistió un total de 15 participantes. Los cuales provienen de los municipios de Amealco de Bonfil, Cadereyta de Montes, Corregidora, Querétaro, San Juan del Río, Tolimán.</a:t>
+              <a:t>Al evento “ABP Virtual” llevado a cabo elJueves 02 de diciembre 2021, asistió un total de 11 participantes. Los cuales provienen de los municipios de Amealco de Bonfil, Arroyo Seco, Cadereyta de Montes, Corregidora, Ezequiel Montes, Huimilpan, Jalpan de Serra, Querétaro, Tequisquiapan.</a:t>
             </a:r>
           </a:p>
         </p:txBody>
